--- a/report_template.pptx
+++ b/report_template.pptx
@@ -17,6 +17,7 @@
     <p:sldId id="2147481021" r:id="rId8"/>
     <p:sldId id="2147481028" r:id="rId9"/>
     <p:sldId id="2147481036" r:id="rId10"/>
+    <p:sldId id="2147481043" r:id="rId29"/>
     <p:sldId id="2147481026" r:id="rId11"/>
     <p:sldId id="2147481041" r:id="rId12"/>
     <p:sldId id="2147481027" r:id="rId13"/>
@@ -3110,6 +3111,636 @@
 </c:chartSpace>
 </file>
 
+<file path=ppt/charts/chart7.xml><?xml version="1.0" encoding="utf-8"?>
+<c:chartSpace xmlns:c="http://schemas.openxmlformats.org/drawingml/2006/chart" xmlns:a="http://schemas.openxmlformats.org/drawingml/2006/main" xmlns:r="http://schemas.openxmlformats.org/officeDocument/2006/relationships" xmlns:c16r2="http://schemas.microsoft.com/office/drawing/2015/06/chart">
+  <c:date1904 val="0"/>
+  <c:lang val="en-US"/>
+  <c:roundedCorners val="1"/>
+  <c:style val="2"/>
+  <c:chart>
+    <c:autoTitleDeleted val="1"/>
+    <c:plotArea>
+      <c:layout/>
+      <c:barChart>
+        <c:barDir val="col"/>
+        <c:grouping val="clustered"/>
+        <c:varyColors val="1"/>
+        <c:ser>
+          <c:idx val="0"/>
+          <c:order val="0"/>
+          <c:tx>
+            <c:strRef>
+              <c:f>Sheet1!$B$1</c:f>
+              <c:strCache>
+                <c:ptCount val="1"/>
+                <c:pt idx="0">
+                  <c:v>الأسبوع 1</c:v>
+                </c:pt>
+              </c:strCache>
+            </c:strRef>
+          </c:tx>
+          <c:spPr>
+            <a:solidFill>
+              <a:srgbClr val="1B2838"/>
+            </a:solidFill>
+            <a:ln>
+              <a:noFill/>
+            </a:ln>
+          </c:spPr>
+          <c:invertIfNegative val="1"/>
+          <c:dLbls>
+            <c:numFmt formatCode="#,##0" sourceLinked="0"/>
+            <c:spPr>
+              <a:noFill/>
+              <a:ln>
+                <a:noFill/>
+              </a:ln>
+              <a:effectLst/>
+            </c:spPr>
+            <c:txPr>
+              <a:bodyPr/>
+              <a:lstStyle/>
+              <a:p>
+                <a:pPr>
+                  <a:defRPr sz="1100" b="1">
+                    <a:solidFill>
+                      <a:srgbClr val="17355C"/>
+                    </a:solidFill>
+                  </a:defRPr>
+                </a:pPr>
+                <a:endParaRPr lang="en-US"/>
+              </a:p>
+            </c:txPr>
+            <c:dLblPos val="outEnd"/>
+            <c:showLegendKey val="0"/>
+            <c:showVal val="1"/>
+            <c:showCatName val="0"/>
+            <c:showSerName val="0"/>
+            <c:showPercent val="0"/>
+            <c:showBubbleSize val="0"/>
+            <c:showLeaderLines val="0"/>
+            <c:extLst>
+              <c:ext xmlns:c15="http://schemas.microsoft.com/office/drawing/2012/chart" uri="{CE6537A1-D6FC-4f65-9D91-7224C49458BB}">
+                <c15:showLeaderLines val="0"/>
+              </c:ext>
+            </c:extLst>
+          </c:dLbls>
+          <c:cat>
+            <c:strRef>
+              <c:f>Sheet1!$B$2:$B$5</c:f>
+              <c:strCache>
+                <c:ptCount val="4"/>
+                <c:pt idx="0">
+                  <c:v>جدة</c:v>
+                </c:pt>
+                <c:pt idx="1">
+                  <c:v>مكة المكرمة</c:v>
+                </c:pt>
+                <c:pt idx="2">
+                  <c:v>المدينة المنورة</c:v>
+                </c:pt>
+                <c:pt idx="3">
+                  <c:v>الطائف</c:v>
+                </c:pt>
+              </c:strCache>
+            </c:strRef>
+          </c:cat>
+          <c:val>
+            <c:numRef>
+              <c:f>Sheet1!$B$2:$B$5</c:f>
+              <c:numCache>
+                <c:formatCode>General</c:formatCode>
+                <c:ptCount val="4"/>
+                <c:pt idx="0">
+                  <c:v>7231</c:v>
+                </c:pt>
+                <c:pt idx="1">
+                  <c:v>6479</c:v>
+                </c:pt>
+                <c:pt idx="2">
+                  <c:v>4812</c:v>
+                </c:pt>
+                <c:pt idx="3">
+                  <c:v>3425</c:v>
+                </c:pt>
+              </c:numCache>
+            </c:numRef>
+          </c:val>
+          <c:extLst>
+            <c:ext xmlns:c14="http://schemas.microsoft.com/office/drawing/2007/8/2/chart" uri="{6F2FDCE9-48DA-4B69-8628-5D25D57E5C99}">
+              <c14:invertSolidFillFmt>
+                <c14:spPr xmlns:c14="http://schemas.microsoft.com/office/drawing/2007/8/2/chart">
+                  <a:solidFill>
+                    <a:srgbClr val="FFFFFF"/>
+                  </a:solidFill>
+                  <a:ln>
+                    <a:noFill/>
+                  </a:ln>
+                </c14:spPr>
+              </c14:invertSolidFillFmt>
+            </c:ext>
+            <c:ext xmlns:c16="http://schemas.microsoft.com/office/drawing/2014/chart" uri="{C3380CC4-5D6E-409C-BE32-E72D297353CC}">
+              <c16:uniqueId val="{00000000-0001-4D15-9008-7D438E402080}"/>
+            </c:ext>
+          </c:extLst>
+        </c:ser>
+        <c:ser>
+          <c:idx val="1"/>
+          <c:order val="1"/>
+          <c:tx>
+            <c:strRef>
+              <c:f>Sheet1!$C$1</c:f>
+              <c:strCache>
+                <c:ptCount val="1"/>
+                <c:pt idx="0">
+                  <c:v>الأسبوع 2</c:v>
+                </c:pt>
+              </c:strCache>
+            </c:strRef>
+          </c:tx>
+          <c:spPr>
+            <a:solidFill>
+              <a:srgbClr val="263D54"/>
+            </a:solidFill>
+            <a:ln>
+              <a:noFill/>
+            </a:ln>
+          </c:spPr>
+          <c:invertIfNegative val="1"/>
+          <c:dLbls>
+            <c:numFmt formatCode="#,##0" sourceLinked="0"/>
+            <c:spPr>
+              <a:noFill/>
+              <a:ln>
+                <a:noFill/>
+              </a:ln>
+              <a:effectLst/>
+            </c:spPr>
+            <c:txPr>
+              <a:bodyPr/>
+              <a:lstStyle/>
+              <a:p>
+                <a:pPr>
+                  <a:defRPr sz="1100" b="1">
+                    <a:solidFill>
+                      <a:srgbClr val="17355C"/>
+                    </a:solidFill>
+                  </a:defRPr>
+                </a:pPr>
+                <a:endParaRPr lang="en-US"/>
+              </a:p>
+            </c:txPr>
+            <c:dLblPos val="outEnd"/>
+            <c:showLegendKey val="0"/>
+            <c:showVal val="1"/>
+            <c:showCatName val="0"/>
+            <c:showSerName val="0"/>
+            <c:showPercent val="0"/>
+            <c:showBubbleSize val="0"/>
+            <c:showLeaderLines val="0"/>
+            <c:extLst>
+              <c:ext xmlns:c15="http://schemas.microsoft.com/office/drawing/2012/chart" uri="{CE6537A1-D6FC-4f65-9D91-7224C49458BB}">
+                <c15:showLeaderLines val="0"/>
+              </c:ext>
+            </c:extLst>
+          </c:dLbls>
+          <c:cat>
+            <c:strRef>
+              <c:f>Sheet1!$C$2:$C$5</c:f>
+              <c:strCache>
+                <c:ptCount val="4"/>
+                <c:pt idx="0">
+                  <c:v>جدة</c:v>
+                </c:pt>
+                <c:pt idx="1">
+                  <c:v>مكة المكرمة</c:v>
+                </c:pt>
+                <c:pt idx="2">
+                  <c:v>المدينة المنورة</c:v>
+                </c:pt>
+                <c:pt idx="3">
+                  <c:v>الطائف</c:v>
+                </c:pt>
+              </c:strCache>
+            </c:strRef>
+          </c:cat>
+          <c:val>
+            <c:numRef>
+              <c:f>Sheet1!$C$2:$C$5</c:f>
+              <c:numCache>
+                <c:formatCode>General</c:formatCode>
+                <c:ptCount val="4"/>
+                <c:pt idx="0">
+                  <c:v>6488</c:v>
+                </c:pt>
+                <c:pt idx="1">
+                  <c:v>5824</c:v>
+                </c:pt>
+                <c:pt idx="2">
+                  <c:v>4055</c:v>
+                </c:pt>
+                <c:pt idx="3">
+                  <c:v>2711</c:v>
+                </c:pt>
+              </c:numCache>
+            </c:numRef>
+          </c:val>
+          <c:extLst>
+            <c:ext xmlns:c14="http://schemas.microsoft.com/office/drawing/2007/8/2/chart" uri="{6F2FDCE9-48DA-4B69-8628-5D25D57E5C99}">
+              <c14:invertSolidFillFmt>
+                <c14:spPr xmlns:c14="http://schemas.microsoft.com/office/drawing/2007/8/2/chart">
+                  <a:solidFill>
+                    <a:srgbClr val="FFFFFF"/>
+                  </a:solidFill>
+                  <a:ln>
+                    <a:noFill/>
+                  </a:ln>
+                </c14:spPr>
+              </c14:invertSolidFillFmt>
+            </c:ext>
+            <c:ext xmlns:c16="http://schemas.microsoft.com/office/drawing/2014/chart" uri="{C3380CC4-5D6E-409C-BE32-E72D297353CC}">
+              <c16:uniqueId val="{00000001-0002-4D15-9008-7D438E402080}"/>
+            </c:ext>
+          </c:extLst>
+        </c:ser>
+        <c:ser>
+          <c:idx val="2"/>
+          <c:order val="2"/>
+          <c:tx>
+            <c:strRef>
+              <c:f>Sheet1!$D$1</c:f>
+              <c:strCache>
+                <c:ptCount val="1"/>
+                <c:pt idx="0">
+                  <c:v>الأسبوع 3</c:v>
+                </c:pt>
+              </c:strCache>
+            </c:strRef>
+          </c:tx>
+          <c:spPr>
+            <a:solidFill>
+              <a:srgbClr val="5B7A94"/>
+            </a:solidFill>
+            <a:ln>
+              <a:noFill/>
+            </a:ln>
+          </c:spPr>
+          <c:invertIfNegative val="1"/>
+          <c:dLbls>
+            <c:numFmt formatCode="#,##0" sourceLinked="0"/>
+            <c:spPr>
+              <a:noFill/>
+              <a:ln>
+                <a:noFill/>
+              </a:ln>
+              <a:effectLst/>
+            </c:spPr>
+            <c:txPr>
+              <a:bodyPr/>
+              <a:lstStyle/>
+              <a:p>
+                <a:pPr>
+                  <a:defRPr sz="1100" b="1">
+                    <a:solidFill>
+                      <a:srgbClr val="17355C"/>
+                    </a:solidFill>
+                  </a:defRPr>
+                </a:pPr>
+                <a:endParaRPr lang="en-US"/>
+              </a:p>
+            </c:txPr>
+            <c:dLblPos val="outEnd"/>
+            <c:showLegendKey val="0"/>
+            <c:showVal val="1"/>
+            <c:showCatName val="0"/>
+            <c:showSerName val="0"/>
+            <c:showPercent val="0"/>
+            <c:showBubbleSize val="0"/>
+            <c:showLeaderLines val="0"/>
+            <c:extLst>
+              <c:ext xmlns:c15="http://schemas.microsoft.com/office/drawing/2012/chart" uri="{CE6537A1-D6FC-4f65-9D91-7224C49458BB}">
+                <c15:showLeaderLines val="0"/>
+              </c:ext>
+            </c:extLst>
+          </c:dLbls>
+          <c:cat>
+            <c:strRef>
+              <c:f>Sheet1!$D$2:$D$5</c:f>
+              <c:strCache>
+                <c:ptCount val="4"/>
+                <c:pt idx="0">
+                  <c:v>جدة</c:v>
+                </c:pt>
+                <c:pt idx="1">
+                  <c:v>مكة المكرمة</c:v>
+                </c:pt>
+                <c:pt idx="2">
+                  <c:v>المدينة المنورة</c:v>
+                </c:pt>
+                <c:pt idx="3">
+                  <c:v>الطائف</c:v>
+                </c:pt>
+              </c:strCache>
+            </c:strRef>
+          </c:cat>
+          <c:val>
+            <c:numRef>
+              <c:f>Sheet1!$B$2:$B$5</c:f>
+              <c:numCache>
+                <c:formatCode>General</c:formatCode>
+                <c:ptCount val="4"/>
+                <c:pt idx="0">
+                  <c:v>7231</c:v>
+                </c:pt>
+                <c:pt idx="1">
+                  <c:v>6479</c:v>
+                </c:pt>
+                <c:pt idx="2">
+                  <c:v>4812</c:v>
+                </c:pt>
+                <c:pt idx="3">
+                  <c:v>3425</c:v>
+                </c:pt>
+              </c:numCache>
+            </c:numRef>
+          </c:val>
+          <c:extLst>
+            <c:ext xmlns:c14="http://schemas.microsoft.com/office/drawing/2007/8/2/chart" uri="{6F2FDCE9-48DA-4B69-8628-5D25D57E5C99}">
+              <c14:invertSolidFillFmt>
+                <c14:spPr xmlns:c14="http://schemas.microsoft.com/office/drawing/2007/8/2/chart">
+                  <a:solidFill>
+                    <a:srgbClr val="FFFFFF"/>
+                  </a:solidFill>
+                  <a:ln>
+                    <a:noFill/>
+                  </a:ln>
+                </c14:spPr>
+              </c14:invertSolidFillFmt>
+            </c:ext>
+            <c:ext xmlns:c16="http://schemas.microsoft.com/office/drawing/2014/chart" uri="{C3380CC4-5D6E-409C-BE32-E72D297353CC}">
+              <c16:uniqueId val="{00000000-0003-4D15-9008-7D438E402080}"/>
+            </c:ext>
+          </c:extLst>
+        </c:ser>
+        <c:ser>
+          <c:idx val="3"/>
+          <c:order val="3"/>
+          <c:tx>
+            <c:strRef>
+              <c:f>Sheet1!$E$1</c:f>
+              <c:strCache>
+                <c:ptCount val="1"/>
+                <c:pt idx="0">
+                  <c:v>الأسبوع 4</c:v>
+                </c:pt>
+              </c:strCache>
+            </c:strRef>
+          </c:tx>
+          <c:spPr>
+            <a:solidFill>
+              <a:srgbClr val="C3D5D1"/>
+            </a:solidFill>
+            <a:ln>
+              <a:noFill/>
+            </a:ln>
+          </c:spPr>
+          <c:invertIfNegative val="1"/>
+          <c:dLbls>
+            <c:numFmt formatCode="#,##0" sourceLinked="0"/>
+            <c:spPr>
+              <a:noFill/>
+              <a:ln>
+                <a:noFill/>
+              </a:ln>
+              <a:effectLst/>
+            </c:spPr>
+            <c:txPr>
+              <a:bodyPr/>
+              <a:lstStyle/>
+              <a:p>
+                <a:pPr>
+                  <a:defRPr sz="1100" b="1">
+                    <a:solidFill>
+                      <a:srgbClr val="17355C"/>
+                    </a:solidFill>
+                  </a:defRPr>
+                </a:pPr>
+                <a:endParaRPr lang="en-US"/>
+              </a:p>
+            </c:txPr>
+            <c:dLblPos val="outEnd"/>
+            <c:showLegendKey val="0"/>
+            <c:showVal val="1"/>
+            <c:showCatName val="0"/>
+            <c:showSerName val="0"/>
+            <c:showPercent val="0"/>
+            <c:showBubbleSize val="0"/>
+            <c:showLeaderLines val="0"/>
+            <c:extLst>
+              <c:ext xmlns:c15="http://schemas.microsoft.com/office/drawing/2012/chart" uri="{CE6537A1-D6FC-4f65-9D91-7224C49458BB}">
+                <c15:showLeaderLines val="0"/>
+              </c:ext>
+            </c:extLst>
+          </c:dLbls>
+          <c:cat>
+            <c:strRef>
+              <c:f>Sheet1!$E$2:$E$5</c:f>
+              <c:strCache>
+                <c:ptCount val="4"/>
+                <c:pt idx="0">
+                  <c:v>جدة</c:v>
+                </c:pt>
+                <c:pt idx="1">
+                  <c:v>مكة المكرمة</c:v>
+                </c:pt>
+                <c:pt idx="2">
+                  <c:v>المدينة المنورة</c:v>
+                </c:pt>
+                <c:pt idx="3">
+                  <c:v>الطائف</c:v>
+                </c:pt>
+              </c:strCache>
+            </c:strRef>
+          </c:cat>
+          <c:val>
+            <c:numRef>
+              <c:f>Sheet1!$C$2:$C$5</c:f>
+              <c:numCache>
+                <c:formatCode>General</c:formatCode>
+                <c:ptCount val="4"/>
+                <c:pt idx="0">
+                  <c:v>6488</c:v>
+                </c:pt>
+                <c:pt idx="1">
+                  <c:v>5824</c:v>
+                </c:pt>
+                <c:pt idx="2">
+                  <c:v>4055</c:v>
+                </c:pt>
+                <c:pt idx="3">
+                  <c:v>2711</c:v>
+                </c:pt>
+              </c:numCache>
+            </c:numRef>
+          </c:val>
+          <c:extLst>
+            <c:ext xmlns:c14="http://schemas.microsoft.com/office/drawing/2007/8/2/chart" uri="{6F2FDCE9-48DA-4B69-8628-5D25D57E5C99}">
+              <c14:invertSolidFillFmt>
+                <c14:spPr xmlns:c14="http://schemas.microsoft.com/office/drawing/2007/8/2/chart">
+                  <a:solidFill>
+                    <a:srgbClr val="FFFFFF"/>
+                  </a:solidFill>
+                  <a:ln>
+                    <a:noFill/>
+                  </a:ln>
+                </c14:spPr>
+              </c14:invertSolidFillFmt>
+            </c:ext>
+            <c:ext xmlns:c16="http://schemas.microsoft.com/office/drawing/2014/chart" uri="{C3380CC4-5D6E-409C-BE32-E72D297353CC}">
+              <c16:uniqueId val="{00000001-0004-4D15-9008-7D438E402080}"/>
+            </c:ext>
+          </c:extLst>
+        </c:ser>
+        <c:dLbls>
+          <c:dLblPos val="outEnd"/>
+          <c:showLegendKey val="0"/>
+          <c:showVal val="1"/>
+          <c:showCatName val="0"/>
+          <c:showSerName val="0"/>
+          <c:showPercent val="0"/>
+          <c:showBubbleSize val="0"/>
+        </c:dLbls>
+        <c:gapWidth val="80"/>
+        <c:overlap val="-10"/>
+        <c:axId val="-2068027336"/>
+        <c:axId val="-2113994440"/>
+      </c:barChart>
+      <c:catAx>
+        <c:axId val="-2068027336"/>
+        <c:scaling>
+          <c:orientation val="maxMin"/>
+        </c:scaling>
+        <c:delete val="0"/>
+        <c:axPos val="b"/>
+        <c:numFmt formatCode="General" sourceLinked="0"/>
+        <c:majorTickMark val="out"/>
+        <c:minorTickMark val="none"/>
+        <c:tickLblPos val="nextTo"/>
+        <c:spPr>
+          <a:ln>
+            <a:solidFill>
+              <a:srgbClr val="CCCCCC"/>
+            </a:solidFill>
+          </a:ln>
+        </c:spPr>
+        <c:txPr>
+          <a:bodyPr/>
+          <a:lstStyle/>
+          <a:p>
+            <a:pPr>
+              <a:defRPr sz="1200">
+                <a:solidFill>
+                  <a:srgbClr val="17355C"/>
+                </a:solidFill>
+                <a:latin typeface="Tajawal" panose="00000500000000000000" pitchFamily="2" charset="-78"/>
+                <a:cs typeface="Tajawal" panose="00000500000000000000" pitchFamily="2" charset="-78"/>
+              </a:defRPr>
+            </a:pPr>
+            <a:endParaRPr lang="en-US"/>
+          </a:p>
+        </c:txPr>
+        <c:crossAx val="-2113994440"/>
+        <c:crosses val="autoZero"/>
+        <c:auto val="1"/>
+        <c:lblAlgn val="ctr"/>
+        <c:lblOffset val="100"/>
+        <c:noMultiLvlLbl val="0"/>
+      </c:catAx>
+      <c:valAx>
+        <c:axId val="-2113994440"/>
+        <c:scaling>
+          <c:orientation val="minMax"/>
+          <c:min val="0"/>
+        </c:scaling>
+        <c:delete val="0"/>
+        <c:axPos val="r"/>
+        <c:majorGridlines>
+          <c:spPr>
+            <a:ln w="6350">
+              <a:solidFill>
+                <a:srgbClr val="E8E8E8"/>
+              </a:solidFill>
+            </a:ln>
+          </c:spPr>
+        </c:majorGridlines>
+        <c:numFmt formatCode="#,##0" sourceLinked="0"/>
+        <c:majorTickMark val="out"/>
+        <c:minorTickMark val="none"/>
+        <c:tickLblPos val="nextTo"/>
+        <c:spPr>
+          <a:ln>
+            <a:noFill/>
+          </a:ln>
+        </c:spPr>
+        <c:txPr>
+          <a:bodyPr/>
+          <a:lstStyle/>
+          <a:p>
+            <a:pPr>
+              <a:defRPr sz="1100">
+                <a:solidFill>
+                  <a:srgbClr val="888888"/>
+                </a:solidFill>
+              </a:defRPr>
+            </a:pPr>
+            <a:endParaRPr lang="en-US"/>
+          </a:p>
+        </c:txPr>
+        <c:crossAx val="-2068027336"/>
+        <c:crosses val="autoZero"/>
+        <c:crossBetween val="between"/>
+      </c:valAx>
+    </c:plotArea>
+    <c:legend>
+      <c:legendPos val="b"/>
+      <c:overlay val="0"/>
+      <c:txPr>
+        <a:bodyPr/>
+        <a:lstStyle/>
+        <a:p>
+          <a:pPr>
+            <a:defRPr sz="1200">
+              <a:solidFill>
+                <a:srgbClr val="17355C"/>
+              </a:solidFill>
+              <a:latin typeface="Tajawal" panose="00000500000000000000" pitchFamily="2" charset="-78"/>
+              <a:cs typeface="Tajawal" panose="00000500000000000000" pitchFamily="2" charset="-78"/>
+            </a:defRPr>
+          </a:pPr>
+          <a:endParaRPr lang="en-US"/>
+        </a:p>
+      </c:txPr>
+    </c:legend>
+    <c:plotVisOnly val="1"/>
+    <c:dispBlanksAs val="gap"/>
+    <c:showDLblsOverMax val="1"/>
+  </c:chart>
+  <c:txPr>
+    <a:bodyPr/>
+    <a:lstStyle/>
+    <a:p>
+      <a:pPr>
+        <a:defRPr sz="1800"/>
+      </a:pPr>
+      <a:endParaRPr lang="en-US"/>
+    </a:p>
+  </c:txPr>
+  <c:externalData r:id="rId1">
+    <c:autoUpdate val="0"/>
+  </c:externalData>
+</c:chartSpace>
+</file>
+
 <file path=ppt/notesMasters/notesMaster1.xml><?xml version="1.0" encoding="utf-8"?>
 <p:notesMaster xmlns:a="http://schemas.openxmlformats.org/drawingml/2006/main" xmlns:r="http://schemas.openxmlformats.org/officeDocument/2006/relationships" xmlns:p="http://schemas.openxmlformats.org/presentationml/2006/main">
   <p:cSld>
@@ -34688,7 +35319,7 @@
 </p:sld>
 </file>
 
-<file path=ppt/slides/slide2.xml><?xml version="1.0" encoding="utf-8"?>
+<file path=ppt/slides/slide17.xml><?xml version="1.0" encoding="utf-8"?>
 <p:sld xmlns:a="http://schemas.openxmlformats.org/drawingml/2006/main" xmlns:r="http://schemas.openxmlformats.org/officeDocument/2006/relationships" xmlns:p="http://schemas.openxmlformats.org/presentationml/2006/main">
   <p:cSld>
     <p:spTree>
@@ -34873,7 +35504,7 @@
           <a:bodyPr anchor="ctr"/>
           <a:lstStyle/>
           <a:p>
-            <a:pPr marL="0" marR="0" lvl="0" indent="0" algn="r" defTabSz="457200" rtl="1" eaLnBrk="1" fontAlgn="auto" latinLnBrk="0" hangingPunct="1">
+            <a:pPr marL="0" marR="0" lvl="0" indent="0" algn="r" defTabSz="457200" rtl="0" eaLnBrk="1" fontAlgn="auto" latinLnBrk="0" hangingPunct="1">
               <a:lnSpc>
                 <a:spcPct val="100000"/>
               </a:lnSpc>
@@ -34905,7 +35536,7 @@
                 <a:ea typeface="GE SS Two Light" panose="020A0503020102020204" pitchFamily="18" charset="-78"/>
                 <a:cs typeface="Tajawal" panose="00000500000000000000" pitchFamily="2" charset="-78"/>
               </a:rPr>
-              <a:t>جدول المحتويات</a:t>
+              <a:t>مقارنة البلاغات</a:t>
             </a:r>
             <a:r>
               <a:rPr kumimoji="0" lang="ar-EG" sz="1800" b="1" i="0" u="none" strike="noStrike" kern="1200" cap="none" spc="0" normalizeH="0" baseline="0" noProof="0" dirty="0">
@@ -34922,7 +35553,7 @@
                 <a:ea typeface="GE SS Two Light" panose="020A0503020102020204" pitchFamily="18" charset="-78"/>
                 <a:cs typeface="Tajawal" panose="00000500000000000000" pitchFamily="2" charset="-78"/>
               </a:rPr>
-              <a:t> - Table of Contents</a:t>
+              <a:t> - أغسطس مقابل سبتمبر 2026</a:t>
             </a:r>
             <a:endParaRPr kumimoji="0" lang="en-SA" sz="1800" b="1" i="0" u="none" strike="noStrike" kern="1200" cap="none" spc="0" normalizeH="0" baseline="0" noProof="0" dirty="0">
               <a:ln>
@@ -35033,6 +35664,1431 @@
           </a:p>
         </p:txBody>
       </p:sp>
+      <p:graphicFrame>
+        <p:nvGraphicFramePr>
+          <p:cNvPr id="78" name="Chart 77"/>
+          <p:cNvGraphicFramePr>
+            <a:graphicFrameLocks noGrp="1"/>
+          </p:cNvGraphicFramePr>
+          <p:nvPr>
+            <p:extLst>
+              <p:ext uri="{D42A27DB-BD31-4B8C-83A1-F6EECF244321}">
+                <p14:modId xmlns:p14="http://schemas.microsoft.com/office/powerpoint/2010/main" val="2538494461"/>
+              </p:ext>
+            </p:extLst>
+          </p:nvPr>
+        </p:nvGraphicFramePr>
+        <p:xfrm>
+          <a:off x="291248" y="2034540"/>
+          <a:ext cx="6556995" cy="2788920"/>
+        </p:xfrm>
+        <a:graphic>
+          <a:graphicData uri="http://schemas.openxmlformats.org/drawingml/2006/chart">
+            <c:chart xmlns:c="http://schemas.openxmlformats.org/drawingml/2006/chart" xmlns:r="http://schemas.openxmlformats.org/officeDocument/2006/relationships" r:id="rId3"/>
+          </a:graphicData>
+        </a:graphic>
+      </p:graphicFrame>
+      <p:graphicFrame>
+        <p:nvGraphicFramePr>
+          <p:cNvPr id="80" name="Table 79"/>
+          <p:cNvGraphicFramePr>
+            <a:graphicFrameLocks noGrp="1"/>
+          </p:cNvGraphicFramePr>
+          <p:nvPr>
+            <p:extLst>
+              <p:ext uri="{D42A27DB-BD31-4B8C-83A1-F6EECF244321}">
+                <p14:modId xmlns:p14="http://schemas.microsoft.com/office/powerpoint/2010/main" val="2287155826"/>
+              </p:ext>
+            </p:extLst>
+          </p:nvPr>
+        </p:nvGraphicFramePr>
+        <p:xfrm>
+          <a:off x="7076842" y="1429090"/>
+          <a:ext cx="4450000" cy="4389948"/>
+        </p:xfrm>
+        <a:graphic>
+          <a:graphicData uri="http://schemas.openxmlformats.org/drawingml/2006/table">
+            <a:tbl>
+              <a:tblPr>
+                <a:tableStyleId>{5C22544A-7EE6-4342-B048-85BDC9FD1C3A}</a:tableStyleId>
+              </a:tblPr>
+              <a:tblGrid>
+                <a:gridCol w="700000">
+                  <a:extLst>
+                    <a:ext uri="{9D8B030D-6E8A-4147-A177-3AD203B41FA5}">
+                      <a16:colId xmlns:a16="http://schemas.microsoft.com/office/drawing/2014/main" val="20000"/>
+                    </a:ext>
+                  </a:extLst>
+                </a:gridCol>
+                <a:gridCol w="680000">
+                  <a:extLst>
+                    <a:ext uri="{9D8B030D-6E8A-4147-A177-3AD203B41FA5}">
+                      <a16:colId xmlns:a16="http://schemas.microsoft.com/office/drawing/2014/main" val="20001"/>
+                    </a:ext>
+                  </a:extLst>
+                </a:gridCol>
+                <a:gridCol w="680000">
+                  <a:extLst>
+                    <a:ext uri="{9D8B030D-6E8A-4147-A177-3AD203B41FA5}">
+                      <a16:colId xmlns:a16="http://schemas.microsoft.com/office/drawing/2014/main" val="20006"/>
+                    </a:ext>
+                  </a:extLst>
+                </a:gridCol>
+                <a:gridCol w="680000">
+                  <a:extLst>
+                    <a:ext uri="{9D8B030D-6E8A-4147-A177-3AD203B41FA5}">
+                      <a16:colId xmlns:a16="http://schemas.microsoft.com/office/drawing/2014/main" val="20007"/>
+                    </a:ext>
+                  </a:extLst>
+                </a:gridCol>
+                <a:gridCol w="680000">
+                  <a:extLst>
+                    <a:ext uri="{9D8B030D-6E8A-4147-A177-3AD203B41FA5}">
+                      <a16:colId xmlns:a16="http://schemas.microsoft.com/office/drawing/2014/main" val="20002"/>
+                    </a:ext>
+                  </a:extLst>
+                </a:gridCol>
+                <a:gridCol w="1030000">
+                  <a:extLst>
+                    <a:ext uri="{9D8B030D-6E8A-4147-A177-3AD203B41FA5}">
+                      <a16:colId xmlns:a16="http://schemas.microsoft.com/office/drawing/2014/main" val="20003"/>
+                    </a:ext>
+                  </a:extLst>
+                </a:gridCol>
+              </a:tblGrid>
+              <a:tr h="731658">
+                <a:tc>
+                  <a:txBody>
+                    <a:bodyPr/>
+                    <a:lstStyle/>
+                    <a:p>
+                      <a:pPr algn="ctr" rtl="1"/>
+                      <a:r>
+                        <a:rPr lang="ar-SA" sz="1200" b="1" dirty="0">
+                          <a:solidFill>
+                            <a:srgbClr val="FFFFFF"/>
+                          </a:solidFill>
+                          <a:latin typeface="Tajawal" panose="00000500000000000000" pitchFamily="2" charset="-78"/>
+                          <a:cs typeface="Tajawal" panose="00000500000000000000" pitchFamily="2" charset="-78"/>
+                        </a:rPr>
+                        <a:t>الفرق</a:t>
+                      </a:r>
+                      <a:endParaRPr sz="1200" b="1" dirty="0">
+                        <a:solidFill>
+                          <a:srgbClr val="FFFFFF"/>
+                        </a:solidFill>
+                        <a:latin typeface="Tajawal" panose="00000500000000000000" pitchFamily="2" charset="-78"/>
+                        <a:cs typeface="Tajawal" panose="00000500000000000000" pitchFamily="2" charset="-78"/>
+                      </a:endParaRPr>
+                    </a:p>
+                  </a:txBody>
+                  <a:tcPr anchor="ctr">
+                    <a:solidFill>
+                      <a:srgbClr val="263D54"/>
+                    </a:solidFill>
+                  </a:tcPr>
+                </a:tc>
+                <a:tc>
+                  <a:txBody>
+                    <a:bodyPr/>
+                    <a:lstStyle/>
+                    <a:p>
+                      <a:pPr algn="ctr" rtl="1"/>
+                      <a:r>
+                        <a:rPr sz="1000" b="1" dirty="0">
+                          <a:solidFill>
+                            <a:srgbClr val="FFFFFF"/>
+                          </a:solidFill>
+                          <a:latin typeface="Tajawal" panose="00000500000000000000" pitchFamily="2" charset="-78"/>
+                          <a:cs typeface="Tajawal" panose="00000500000000000000" pitchFamily="2" charset="-78"/>
+                        </a:rPr>
+                        <a:t>سبتمبر</a:t>
+                      </a:r>
+                    </a:p>
+                  </a:txBody>
+                  <a:tcPr anchor="ctr">
+                    <a:solidFill>
+                      <a:srgbClr val="263D54"/>
+                    </a:solidFill>
+                  </a:tcPr>
+                </a:tc>
+                <a:tc>
+                  <a:txBody>
+                    <a:bodyPr/>
+                    <a:lstStyle/>
+                    <a:p>
+                      <a:pPr algn="ctr" rtl="1"/>
+                      <a:r>
+                        <a:rPr sz="1000" b="1" dirty="0">
+                          <a:solidFill>
+                            <a:srgbClr val="FFFFFF"/>
+                          </a:solidFill>
+                          <a:latin typeface="Tajawal" panose="00000500000000000000" pitchFamily="2" charset="-78"/>
+                          <a:cs typeface="Tajawal" panose="00000500000000000000" pitchFamily="2" charset="-78"/>
+                        </a:rPr>
+                        <a:t>سبتمبر</a:t>
+                      </a:r>
+                    </a:p>
+                  </a:txBody>
+                  <a:tcPr anchor="ctr">
+                    <a:solidFill>
+                      <a:srgbClr val="263D54"/>
+                    </a:solidFill>
+                  </a:tcPr>
+                </a:tc>
+                <a:tc>
+                  <a:txBody>
+                    <a:bodyPr/>
+                    <a:lstStyle/>
+                    <a:p>
+                      <a:pPr algn="ctr" rtl="1"/>
+                      <a:r>
+                        <a:rPr sz="1000" b="1">
+                          <a:solidFill>
+                            <a:srgbClr val="FFFFFF"/>
+                          </a:solidFill>
+                          <a:latin typeface="Tajawal" panose="00000500000000000000" pitchFamily="2" charset="-78"/>
+                          <a:cs typeface="Tajawal" panose="00000500000000000000" pitchFamily="2" charset="-78"/>
+                        </a:rPr>
+                        <a:t>أغسطس</a:t>
+                      </a:r>
+                    </a:p>
+                  </a:txBody>
+                  <a:tcPr anchor="ctr">
+                    <a:solidFill>
+                      <a:srgbClr val="263D54"/>
+                    </a:solidFill>
+                  </a:tcPr>
+                </a:tc>
+                <a:tc>
+                  <a:txBody>
+                    <a:bodyPr/>
+                    <a:lstStyle/>
+                    <a:p>
+                      <a:pPr algn="ctr" rtl="1"/>
+                      <a:r>
+                        <a:rPr sz="1000" b="1">
+                          <a:solidFill>
+                            <a:srgbClr val="FFFFFF"/>
+                          </a:solidFill>
+                          <a:latin typeface="Tajawal" panose="00000500000000000000" pitchFamily="2" charset="-78"/>
+                          <a:cs typeface="Tajawal" panose="00000500000000000000" pitchFamily="2" charset="-78"/>
+                        </a:rPr>
+                        <a:t>أغسطس</a:t>
+                      </a:r>
+                    </a:p>
+                  </a:txBody>
+                  <a:tcPr anchor="ctr">
+                    <a:solidFill>
+                      <a:srgbClr val="263D54"/>
+                    </a:solidFill>
+                  </a:tcPr>
+                </a:tc>
+                <a:tc>
+                  <a:txBody>
+                    <a:bodyPr/>
+                    <a:lstStyle/>
+                    <a:p>
+                      <a:pPr algn="ctr" rtl="1"/>
+                      <a:r>
+                        <a:rPr sz="1200" b="1" dirty="0">
+                          <a:solidFill>
+                            <a:srgbClr val="FFFFFF"/>
+                          </a:solidFill>
+                          <a:latin typeface="Tajawal" panose="00000500000000000000" pitchFamily="2" charset="-78"/>
+                          <a:cs typeface="Tajawal" panose="00000500000000000000" pitchFamily="2" charset="-78"/>
+                        </a:rPr>
+                        <a:t>المنطقة</a:t>
+                      </a:r>
+                    </a:p>
+                  </a:txBody>
+                  <a:tcPr anchor="ctr">
+                    <a:solidFill>
+                      <a:srgbClr val="263D54"/>
+                    </a:solidFill>
+                  </a:tcPr>
+                </a:tc>
+                <a:extLst>
+                  <a:ext uri="{0D108BD9-81ED-4DB2-BD59-A6C34878D82A}">
+                    <a16:rowId xmlns:a16="http://schemas.microsoft.com/office/drawing/2014/main" val="10000"/>
+                  </a:ext>
+                </a:extLst>
+              </a:tr>
+              <a:tr h="731658">
+                <a:tc>
+                  <a:txBody>
+                    <a:bodyPr/>
+                    <a:lstStyle/>
+                    <a:p>
+                      <a:pPr algn="ctr" rtl="1"/>
+                      <a:r>
+                        <a:rPr lang="en-US" sz="1050" b="0" dirty="0">
+                          <a:solidFill>
+                            <a:srgbClr val="17355C"/>
+                          </a:solidFill>
+                          <a:latin typeface="Tajawal" panose="00000500000000000000" pitchFamily="2" charset="-78"/>
+                          <a:cs typeface="Tajawal" panose="00000500000000000000" pitchFamily="2" charset="-78"/>
+                        </a:rPr>
+                        <a:t>10.3%</a:t>
+                      </a:r>
+                      <a:r>
+                        <a:rPr lang="ar-SA" sz="1050" b="0" dirty="0">
+                          <a:solidFill>
+                            <a:srgbClr val="17355C"/>
+                          </a:solidFill>
+                          <a:latin typeface="Tajawal" panose="00000500000000000000" pitchFamily="2" charset="-78"/>
+                          <a:cs typeface="Tajawal" panose="00000500000000000000" pitchFamily="2" charset="-78"/>
+                        </a:rPr>
+                        <a:t>-</a:t>
+                      </a:r>
+                      <a:endParaRPr sz="1050" b="0" dirty="0">
+                        <a:solidFill>
+                          <a:srgbClr val="17355C"/>
+                        </a:solidFill>
+                        <a:latin typeface="Tajawal" panose="00000500000000000000" pitchFamily="2" charset="-78"/>
+                        <a:cs typeface="Tajawal" panose="00000500000000000000" pitchFamily="2" charset="-78"/>
+                      </a:endParaRPr>
+                    </a:p>
+                  </a:txBody>
+                  <a:tcPr anchor="ctr">
+                    <a:solidFill>
+                      <a:srgbClr val="FFFFFF"/>
+                    </a:solidFill>
+                  </a:tcPr>
+                </a:tc>
+                <a:tc>
+                  <a:txBody>
+                    <a:bodyPr/>
+                    <a:lstStyle/>
+                    <a:p>
+                      <a:pPr algn="ctr" rtl="1"/>
+                      <a:r>
+                        <a:rPr sz="1050" b="0" dirty="0">
+                          <a:solidFill>
+                            <a:srgbClr val="17355C"/>
+                          </a:solidFill>
+                          <a:latin typeface="Tajawal" panose="00000500000000000000" pitchFamily="2" charset="-78"/>
+                          <a:cs typeface="Tajawal" panose="00000500000000000000" pitchFamily="2" charset="-78"/>
+                        </a:rPr>
+                        <a:t>6,488</a:t>
+                      </a:r>
+                    </a:p>
+                  </a:txBody>
+                  <a:tcPr anchor="ctr">
+                    <a:solidFill>
+                      <a:srgbClr val="FFFFFF"/>
+                    </a:solidFill>
+                  </a:tcPr>
+                </a:tc>
+                <a:tc>
+                  <a:txBody>
+                    <a:bodyPr/>
+                    <a:lstStyle/>
+                    <a:p>
+                      <a:pPr algn="ctr" rtl="1"/>
+                      <a:r>
+                        <a:rPr sz="1050" b="0" dirty="0">
+                          <a:solidFill>
+                            <a:srgbClr val="17355C"/>
+                          </a:solidFill>
+                          <a:latin typeface="Tajawal" panose="00000500000000000000" pitchFamily="2" charset="-78"/>
+                          <a:cs typeface="Tajawal" panose="00000500000000000000" pitchFamily="2" charset="-78"/>
+                        </a:rPr>
+                        <a:t>6,488</a:t>
+                      </a:r>
+                    </a:p>
+                  </a:txBody>
+                  <a:tcPr anchor="ctr">
+                    <a:solidFill>
+                      <a:srgbClr val="FFFFFF"/>
+                    </a:solidFill>
+                  </a:tcPr>
+                </a:tc>
+                <a:tc>
+                  <a:txBody>
+                    <a:bodyPr/>
+                    <a:lstStyle/>
+                    <a:p>
+                      <a:pPr algn="ctr" rtl="1"/>
+                      <a:r>
+                        <a:rPr sz="1050" b="0" dirty="0">
+                          <a:solidFill>
+                            <a:srgbClr val="17355C"/>
+                          </a:solidFill>
+                          <a:latin typeface="Tajawal" panose="00000500000000000000" pitchFamily="2" charset="-78"/>
+                          <a:cs typeface="Tajawal" panose="00000500000000000000" pitchFamily="2" charset="-78"/>
+                        </a:rPr>
+                        <a:t>7,231</a:t>
+                      </a:r>
+                    </a:p>
+                  </a:txBody>
+                  <a:tcPr anchor="ctr">
+                    <a:solidFill>
+                      <a:srgbClr val="FFFFFF"/>
+                    </a:solidFill>
+                  </a:tcPr>
+                </a:tc>
+                <a:tc>
+                  <a:txBody>
+                    <a:bodyPr/>
+                    <a:lstStyle/>
+                    <a:p>
+                      <a:pPr algn="ctr" rtl="1"/>
+                      <a:r>
+                        <a:rPr sz="1050" b="0" dirty="0">
+                          <a:solidFill>
+                            <a:srgbClr val="17355C"/>
+                          </a:solidFill>
+                          <a:latin typeface="Tajawal" panose="00000500000000000000" pitchFamily="2" charset="-78"/>
+                          <a:cs typeface="Tajawal" panose="00000500000000000000" pitchFamily="2" charset="-78"/>
+                        </a:rPr>
+                        <a:t>7,231</a:t>
+                      </a:r>
+                    </a:p>
+                  </a:txBody>
+                  <a:tcPr anchor="ctr">
+                    <a:solidFill>
+                      <a:srgbClr val="FFFFFF"/>
+                    </a:solidFill>
+                  </a:tcPr>
+                </a:tc>
+                <a:tc>
+                  <a:txBody>
+                    <a:bodyPr/>
+                    <a:lstStyle/>
+                    <a:p>
+                      <a:pPr algn="ctr" rtl="1"/>
+                      <a:r>
+                        <a:rPr sz="1050" b="0" dirty="0">
+                          <a:solidFill>
+                            <a:srgbClr val="17355C"/>
+                          </a:solidFill>
+                          <a:latin typeface="Tajawal" panose="00000500000000000000" pitchFamily="2" charset="-78"/>
+                          <a:cs typeface="Tajawal" panose="00000500000000000000" pitchFamily="2" charset="-78"/>
+                        </a:rPr>
+                        <a:t>جدة</a:t>
+                      </a:r>
+                    </a:p>
+                  </a:txBody>
+                  <a:tcPr anchor="ctr">
+                    <a:solidFill>
+                      <a:srgbClr val="FFFFFF"/>
+                    </a:solidFill>
+                  </a:tcPr>
+                </a:tc>
+                <a:extLst>
+                  <a:ext uri="{0D108BD9-81ED-4DB2-BD59-A6C34878D82A}">
+                    <a16:rowId xmlns:a16="http://schemas.microsoft.com/office/drawing/2014/main" val="10001"/>
+                  </a:ext>
+                </a:extLst>
+              </a:tr>
+              <a:tr h="731658">
+                <a:tc>
+                  <a:txBody>
+                    <a:bodyPr/>
+                    <a:lstStyle/>
+                    <a:p>
+                      <a:pPr algn="ctr" rtl="1"/>
+                      <a:r>
+                        <a:rPr sz="1050" b="0" dirty="0">
+                          <a:solidFill>
+                            <a:srgbClr val="17355C"/>
+                          </a:solidFill>
+                          <a:latin typeface="Tajawal" panose="00000500000000000000" pitchFamily="2" charset="-78"/>
+                          <a:cs typeface="Tajawal" panose="00000500000000000000" pitchFamily="2" charset="-78"/>
+                        </a:rPr>
+                        <a:t>-</a:t>
+                      </a:r>
+                      <a:r>
+                        <a:rPr lang="en-US" sz="1050" b="0" dirty="0">
+                          <a:solidFill>
+                            <a:srgbClr val="17355C"/>
+                          </a:solidFill>
+                          <a:latin typeface="Tajawal" panose="00000500000000000000" pitchFamily="2" charset="-78"/>
+                          <a:cs typeface="Tajawal" panose="00000500000000000000" pitchFamily="2" charset="-78"/>
+                        </a:rPr>
+                        <a:t>10.1%</a:t>
+                      </a:r>
+                      <a:endParaRPr sz="1050" b="0" dirty="0">
+                        <a:solidFill>
+                          <a:srgbClr val="17355C"/>
+                        </a:solidFill>
+                        <a:latin typeface="Tajawal" panose="00000500000000000000" pitchFamily="2" charset="-78"/>
+                        <a:cs typeface="Tajawal" panose="00000500000000000000" pitchFamily="2" charset="-78"/>
+                      </a:endParaRPr>
+                    </a:p>
+                  </a:txBody>
+                  <a:tcPr anchor="ctr">
+                    <a:solidFill>
+                      <a:srgbClr val="C3D5D1"/>
+                    </a:solidFill>
+                  </a:tcPr>
+                </a:tc>
+                <a:tc>
+                  <a:txBody>
+                    <a:bodyPr/>
+                    <a:lstStyle/>
+                    <a:p>
+                      <a:pPr algn="ctr" rtl="1"/>
+                      <a:r>
+                        <a:rPr sz="1050" b="0" dirty="0">
+                          <a:solidFill>
+                            <a:srgbClr val="17355C"/>
+                          </a:solidFill>
+                          <a:latin typeface="Tajawal" panose="00000500000000000000" pitchFamily="2" charset="-78"/>
+                          <a:cs typeface="Tajawal" panose="00000500000000000000" pitchFamily="2" charset="-78"/>
+                        </a:rPr>
+                        <a:t>5,824</a:t>
+                      </a:r>
+                    </a:p>
+                  </a:txBody>
+                  <a:tcPr anchor="ctr">
+                    <a:solidFill>
+                      <a:srgbClr val="C3D5D1"/>
+                    </a:solidFill>
+                  </a:tcPr>
+                </a:tc>
+                <a:tc>
+                  <a:txBody>
+                    <a:bodyPr/>
+                    <a:lstStyle/>
+                    <a:p>
+                      <a:pPr algn="ctr" rtl="1"/>
+                      <a:r>
+                        <a:rPr sz="1050" b="0" dirty="0">
+                          <a:solidFill>
+                            <a:srgbClr val="17355C"/>
+                          </a:solidFill>
+                          <a:latin typeface="Tajawal" panose="00000500000000000000" pitchFamily="2" charset="-78"/>
+                          <a:cs typeface="Tajawal" panose="00000500000000000000" pitchFamily="2" charset="-78"/>
+                        </a:rPr>
+                        <a:t>5,824</a:t>
+                      </a:r>
+                    </a:p>
+                  </a:txBody>
+                  <a:tcPr anchor="ctr">
+                    <a:solidFill>
+                      <a:srgbClr val="C3D5D1"/>
+                    </a:solidFill>
+                  </a:tcPr>
+                </a:tc>
+                <a:tc>
+                  <a:txBody>
+                    <a:bodyPr/>
+                    <a:lstStyle/>
+                    <a:p>
+                      <a:pPr algn="ctr" rtl="1"/>
+                      <a:r>
+                        <a:rPr sz="1050" b="0" dirty="0">
+                          <a:solidFill>
+                            <a:srgbClr val="17355C"/>
+                          </a:solidFill>
+                          <a:latin typeface="Tajawal" panose="00000500000000000000" pitchFamily="2" charset="-78"/>
+                          <a:cs typeface="Tajawal" panose="00000500000000000000" pitchFamily="2" charset="-78"/>
+                        </a:rPr>
+                        <a:t>6,479</a:t>
+                      </a:r>
+                    </a:p>
+                  </a:txBody>
+                  <a:tcPr anchor="ctr">
+                    <a:solidFill>
+                      <a:srgbClr val="C3D5D1"/>
+                    </a:solidFill>
+                  </a:tcPr>
+                </a:tc>
+                <a:tc>
+                  <a:txBody>
+                    <a:bodyPr/>
+                    <a:lstStyle/>
+                    <a:p>
+                      <a:pPr algn="ctr" rtl="1"/>
+                      <a:r>
+                        <a:rPr sz="1050" b="0" dirty="0">
+                          <a:solidFill>
+                            <a:srgbClr val="17355C"/>
+                          </a:solidFill>
+                          <a:latin typeface="Tajawal" panose="00000500000000000000" pitchFamily="2" charset="-78"/>
+                          <a:cs typeface="Tajawal" panose="00000500000000000000" pitchFamily="2" charset="-78"/>
+                        </a:rPr>
+                        <a:t>6,479</a:t>
+                      </a:r>
+                    </a:p>
+                  </a:txBody>
+                  <a:tcPr anchor="ctr">
+                    <a:solidFill>
+                      <a:srgbClr val="C3D5D1"/>
+                    </a:solidFill>
+                  </a:tcPr>
+                </a:tc>
+                <a:tc>
+                  <a:txBody>
+                    <a:bodyPr/>
+                    <a:lstStyle/>
+                    <a:p>
+                      <a:pPr algn="ctr" rtl="1"/>
+                      <a:r>
+                        <a:rPr sz="1050" b="0" dirty="0">
+                          <a:solidFill>
+                            <a:srgbClr val="17355C"/>
+                          </a:solidFill>
+                          <a:latin typeface="Tajawal" panose="00000500000000000000" pitchFamily="2" charset="-78"/>
+                          <a:cs typeface="Tajawal" panose="00000500000000000000" pitchFamily="2" charset="-78"/>
+                        </a:rPr>
+                        <a:t>مكة المكرمة</a:t>
+                      </a:r>
+                    </a:p>
+                  </a:txBody>
+                  <a:tcPr anchor="ctr">
+                    <a:solidFill>
+                      <a:srgbClr val="C3D5D1"/>
+                    </a:solidFill>
+                  </a:tcPr>
+                </a:tc>
+                <a:extLst>
+                  <a:ext uri="{0D108BD9-81ED-4DB2-BD59-A6C34878D82A}">
+                    <a16:rowId xmlns:a16="http://schemas.microsoft.com/office/drawing/2014/main" val="10002"/>
+                  </a:ext>
+                </a:extLst>
+              </a:tr>
+              <a:tr h="731658">
+                <a:tc>
+                  <a:txBody>
+                    <a:bodyPr/>
+                    <a:lstStyle/>
+                    <a:p>
+                      <a:pPr algn="ctr" rtl="1"/>
+                      <a:r>
+                        <a:rPr lang="en-US" sz="1050" b="0" dirty="0">
+                          <a:solidFill>
+                            <a:srgbClr val="17355C"/>
+                          </a:solidFill>
+                          <a:latin typeface="Tajawal" panose="00000500000000000000" pitchFamily="2" charset="-78"/>
+                          <a:cs typeface="Tajawal" panose="00000500000000000000" pitchFamily="2" charset="-78"/>
+                        </a:rPr>
+                        <a:t>-15.7%</a:t>
+                      </a:r>
+                      <a:endParaRPr sz="1050" b="0" dirty="0">
+                        <a:solidFill>
+                          <a:srgbClr val="17355C"/>
+                        </a:solidFill>
+                        <a:latin typeface="Tajawal" panose="00000500000000000000" pitchFamily="2" charset="-78"/>
+                        <a:cs typeface="Tajawal" panose="00000500000000000000" pitchFamily="2" charset="-78"/>
+                      </a:endParaRPr>
+                    </a:p>
+                  </a:txBody>
+                  <a:tcPr anchor="ctr">
+                    <a:solidFill>
+                      <a:srgbClr val="FFFFFF"/>
+                    </a:solidFill>
+                  </a:tcPr>
+                </a:tc>
+                <a:tc>
+                  <a:txBody>
+                    <a:bodyPr/>
+                    <a:lstStyle/>
+                    <a:p>
+                      <a:pPr algn="ctr" rtl="1"/>
+                      <a:r>
+                        <a:rPr sz="1050" b="0">
+                          <a:solidFill>
+                            <a:srgbClr val="17355C"/>
+                          </a:solidFill>
+                          <a:latin typeface="Tajawal" panose="00000500000000000000" pitchFamily="2" charset="-78"/>
+                          <a:cs typeface="Tajawal" panose="00000500000000000000" pitchFamily="2" charset="-78"/>
+                        </a:rPr>
+                        <a:t>4,055</a:t>
+                      </a:r>
+                    </a:p>
+                  </a:txBody>
+                  <a:tcPr anchor="ctr">
+                    <a:solidFill>
+                      <a:srgbClr val="FFFFFF"/>
+                    </a:solidFill>
+                  </a:tcPr>
+                </a:tc>
+                <a:tc>
+                  <a:txBody>
+                    <a:bodyPr/>
+                    <a:lstStyle/>
+                    <a:p>
+                      <a:pPr algn="ctr" rtl="1"/>
+                      <a:r>
+                        <a:rPr sz="1050" b="0">
+                          <a:solidFill>
+                            <a:srgbClr val="17355C"/>
+                          </a:solidFill>
+                          <a:latin typeface="Tajawal" panose="00000500000000000000" pitchFamily="2" charset="-78"/>
+                          <a:cs typeface="Tajawal" panose="00000500000000000000" pitchFamily="2" charset="-78"/>
+                        </a:rPr>
+                        <a:t>4,055</a:t>
+                      </a:r>
+                    </a:p>
+                  </a:txBody>
+                  <a:tcPr anchor="ctr">
+                    <a:solidFill>
+                      <a:srgbClr val="FFFFFF"/>
+                    </a:solidFill>
+                  </a:tcPr>
+                </a:tc>
+                <a:tc>
+                  <a:txBody>
+                    <a:bodyPr/>
+                    <a:lstStyle/>
+                    <a:p>
+                      <a:pPr algn="ctr" rtl="1"/>
+                      <a:r>
+                        <a:rPr sz="1050" b="0">
+                          <a:solidFill>
+                            <a:srgbClr val="17355C"/>
+                          </a:solidFill>
+                          <a:latin typeface="Tajawal" panose="00000500000000000000" pitchFamily="2" charset="-78"/>
+                          <a:cs typeface="Tajawal" panose="00000500000000000000" pitchFamily="2" charset="-78"/>
+                        </a:rPr>
+                        <a:t>4,812</a:t>
+                      </a:r>
+                    </a:p>
+                  </a:txBody>
+                  <a:tcPr anchor="ctr">
+                    <a:solidFill>
+                      <a:srgbClr val="FFFFFF"/>
+                    </a:solidFill>
+                  </a:tcPr>
+                </a:tc>
+                <a:tc>
+                  <a:txBody>
+                    <a:bodyPr/>
+                    <a:lstStyle/>
+                    <a:p>
+                      <a:pPr algn="ctr" rtl="1"/>
+                      <a:r>
+                        <a:rPr sz="1050" b="0">
+                          <a:solidFill>
+                            <a:srgbClr val="17355C"/>
+                          </a:solidFill>
+                          <a:latin typeface="Tajawal" panose="00000500000000000000" pitchFamily="2" charset="-78"/>
+                          <a:cs typeface="Tajawal" panose="00000500000000000000" pitchFamily="2" charset="-78"/>
+                        </a:rPr>
+                        <a:t>4,812</a:t>
+                      </a:r>
+                    </a:p>
+                  </a:txBody>
+                  <a:tcPr anchor="ctr">
+                    <a:solidFill>
+                      <a:srgbClr val="FFFFFF"/>
+                    </a:solidFill>
+                  </a:tcPr>
+                </a:tc>
+                <a:tc>
+                  <a:txBody>
+                    <a:bodyPr/>
+                    <a:lstStyle/>
+                    <a:p>
+                      <a:pPr algn="ctr" rtl="1"/>
+                      <a:r>
+                        <a:rPr sz="1050" b="0" dirty="0">
+                          <a:solidFill>
+                            <a:srgbClr val="17355C"/>
+                          </a:solidFill>
+                          <a:latin typeface="Tajawal" panose="00000500000000000000" pitchFamily="2" charset="-78"/>
+                          <a:cs typeface="Tajawal" panose="00000500000000000000" pitchFamily="2" charset="-78"/>
+                        </a:rPr>
+                        <a:t>المدينة المنورة</a:t>
+                      </a:r>
+                    </a:p>
+                  </a:txBody>
+                  <a:tcPr anchor="ctr">
+                    <a:solidFill>
+                      <a:srgbClr val="FFFFFF"/>
+                    </a:solidFill>
+                  </a:tcPr>
+                </a:tc>
+                <a:extLst>
+                  <a:ext uri="{0D108BD9-81ED-4DB2-BD59-A6C34878D82A}">
+                    <a16:rowId xmlns:a16="http://schemas.microsoft.com/office/drawing/2014/main" val="10003"/>
+                  </a:ext>
+                </a:extLst>
+              </a:tr>
+              <a:tr h="731658">
+                <a:tc>
+                  <a:txBody>
+                    <a:bodyPr/>
+                    <a:lstStyle/>
+                    <a:p>
+                      <a:pPr algn="ctr" rtl="1"/>
+                      <a:r>
+                        <a:rPr lang="en-US" sz="1050" b="0" dirty="0">
+                          <a:solidFill>
+                            <a:srgbClr val="17355C"/>
+                          </a:solidFill>
+                          <a:latin typeface="Tajawal" panose="00000500000000000000" pitchFamily="2" charset="-78"/>
+                          <a:cs typeface="Tajawal" panose="00000500000000000000" pitchFamily="2" charset="-78"/>
+                        </a:rPr>
+                        <a:t>-20.8%</a:t>
+                      </a:r>
+                      <a:endParaRPr sz="1050" b="0" dirty="0">
+                        <a:solidFill>
+                          <a:srgbClr val="17355C"/>
+                        </a:solidFill>
+                        <a:latin typeface="Tajawal" panose="00000500000000000000" pitchFamily="2" charset="-78"/>
+                        <a:cs typeface="Tajawal" panose="00000500000000000000" pitchFamily="2" charset="-78"/>
+                      </a:endParaRPr>
+                    </a:p>
+                  </a:txBody>
+                  <a:tcPr anchor="ctr">
+                    <a:solidFill>
+                      <a:srgbClr val="C3D5D1"/>
+                    </a:solidFill>
+                  </a:tcPr>
+                </a:tc>
+                <a:tc>
+                  <a:txBody>
+                    <a:bodyPr/>
+                    <a:lstStyle/>
+                    <a:p>
+                      <a:pPr algn="ctr" rtl="1"/>
+                      <a:r>
+                        <a:rPr sz="1050" b="0">
+                          <a:solidFill>
+                            <a:srgbClr val="17355C"/>
+                          </a:solidFill>
+                          <a:latin typeface="Tajawal" panose="00000500000000000000" pitchFamily="2" charset="-78"/>
+                          <a:cs typeface="Tajawal" panose="00000500000000000000" pitchFamily="2" charset="-78"/>
+                        </a:rPr>
+                        <a:t>2,711</a:t>
+                      </a:r>
+                    </a:p>
+                  </a:txBody>
+                  <a:tcPr anchor="ctr">
+                    <a:solidFill>
+                      <a:srgbClr val="C3D5D1"/>
+                    </a:solidFill>
+                  </a:tcPr>
+                </a:tc>
+                <a:tc>
+                  <a:txBody>
+                    <a:bodyPr/>
+                    <a:lstStyle/>
+                    <a:p>
+                      <a:pPr algn="ctr" rtl="1"/>
+                      <a:r>
+                        <a:rPr sz="1050" b="0">
+                          <a:solidFill>
+                            <a:srgbClr val="17355C"/>
+                          </a:solidFill>
+                          <a:latin typeface="Tajawal" panose="00000500000000000000" pitchFamily="2" charset="-78"/>
+                          <a:cs typeface="Tajawal" panose="00000500000000000000" pitchFamily="2" charset="-78"/>
+                        </a:rPr>
+                        <a:t>2,711</a:t>
+                      </a:r>
+                    </a:p>
+                  </a:txBody>
+                  <a:tcPr anchor="ctr">
+                    <a:solidFill>
+                      <a:srgbClr val="C3D5D1"/>
+                    </a:solidFill>
+                  </a:tcPr>
+                </a:tc>
+                <a:tc>
+                  <a:txBody>
+                    <a:bodyPr/>
+                    <a:lstStyle/>
+                    <a:p>
+                      <a:pPr algn="ctr" rtl="1"/>
+                      <a:r>
+                        <a:rPr sz="1050" b="0">
+                          <a:solidFill>
+                            <a:srgbClr val="17355C"/>
+                          </a:solidFill>
+                          <a:latin typeface="Tajawal" panose="00000500000000000000" pitchFamily="2" charset="-78"/>
+                          <a:cs typeface="Tajawal" panose="00000500000000000000" pitchFamily="2" charset="-78"/>
+                        </a:rPr>
+                        <a:t>3,425</a:t>
+                      </a:r>
+                    </a:p>
+                  </a:txBody>
+                  <a:tcPr anchor="ctr">
+                    <a:solidFill>
+                      <a:srgbClr val="C3D5D1"/>
+                    </a:solidFill>
+                  </a:tcPr>
+                </a:tc>
+                <a:tc>
+                  <a:txBody>
+                    <a:bodyPr/>
+                    <a:lstStyle/>
+                    <a:p>
+                      <a:pPr algn="ctr" rtl="1"/>
+                      <a:r>
+                        <a:rPr sz="1050" b="0">
+                          <a:solidFill>
+                            <a:srgbClr val="17355C"/>
+                          </a:solidFill>
+                          <a:latin typeface="Tajawal" panose="00000500000000000000" pitchFamily="2" charset="-78"/>
+                          <a:cs typeface="Tajawal" panose="00000500000000000000" pitchFamily="2" charset="-78"/>
+                        </a:rPr>
+                        <a:t>3,425</a:t>
+                      </a:r>
+                    </a:p>
+                  </a:txBody>
+                  <a:tcPr anchor="ctr">
+                    <a:solidFill>
+                      <a:srgbClr val="C3D5D1"/>
+                    </a:solidFill>
+                  </a:tcPr>
+                </a:tc>
+                <a:tc>
+                  <a:txBody>
+                    <a:bodyPr/>
+                    <a:lstStyle/>
+                    <a:p>
+                      <a:pPr algn="ctr" rtl="1"/>
+                      <a:r>
+                        <a:rPr sz="1050" b="0" dirty="0">
+                          <a:solidFill>
+                            <a:srgbClr val="17355C"/>
+                          </a:solidFill>
+                          <a:latin typeface="Tajawal" panose="00000500000000000000" pitchFamily="2" charset="-78"/>
+                          <a:cs typeface="Tajawal" panose="00000500000000000000" pitchFamily="2" charset="-78"/>
+                        </a:rPr>
+                        <a:t>الطائف</a:t>
+                      </a:r>
+                    </a:p>
+                  </a:txBody>
+                  <a:tcPr anchor="ctr">
+                    <a:solidFill>
+                      <a:srgbClr val="C3D5D1"/>
+                    </a:solidFill>
+                  </a:tcPr>
+                </a:tc>
+                <a:extLst>
+                  <a:ext uri="{0D108BD9-81ED-4DB2-BD59-A6C34878D82A}">
+                    <a16:rowId xmlns:a16="http://schemas.microsoft.com/office/drawing/2014/main" val="10004"/>
+                  </a:ext>
+                </a:extLst>
+              </a:tr>
+              <a:tr h="731658">
+                <a:tc>
+                  <a:txBody>
+                    <a:bodyPr/>
+                    <a:lstStyle/>
+                    <a:p>
+                      <a:pPr algn="ctr" rtl="1"/>
+                      <a:r>
+                        <a:rPr lang="en-US" sz="1050" b="1" dirty="0">
+                          <a:solidFill>
+                            <a:srgbClr val="FFFFFF"/>
+                          </a:solidFill>
+                          <a:latin typeface="Tajawal" panose="00000500000000000000" pitchFamily="2" charset="-78"/>
+                          <a:cs typeface="Tajawal" panose="00000500000000000000" pitchFamily="2" charset="-78"/>
+                        </a:rPr>
+                        <a:t>-13.1%</a:t>
+                      </a:r>
+                      <a:endParaRPr sz="1050" b="1" dirty="0">
+                        <a:solidFill>
+                          <a:srgbClr val="FFFFFF"/>
+                        </a:solidFill>
+                        <a:latin typeface="Tajawal" panose="00000500000000000000" pitchFamily="2" charset="-78"/>
+                        <a:cs typeface="Tajawal" panose="00000500000000000000" pitchFamily="2" charset="-78"/>
+                      </a:endParaRPr>
+                    </a:p>
+                  </a:txBody>
+                  <a:tcPr anchor="ctr">
+                    <a:solidFill>
+                      <a:srgbClr val="263D54"/>
+                    </a:solidFill>
+                  </a:tcPr>
+                </a:tc>
+                <a:tc>
+                  <a:txBody>
+                    <a:bodyPr/>
+                    <a:lstStyle/>
+                    <a:p>
+                      <a:pPr algn="ctr" rtl="1"/>
+                      <a:r>
+                        <a:rPr sz="1050" b="1">
+                          <a:solidFill>
+                            <a:srgbClr val="FFFFFF"/>
+                          </a:solidFill>
+                          <a:latin typeface="Tajawal" panose="00000500000000000000" pitchFamily="2" charset="-78"/>
+                          <a:cs typeface="Tajawal" panose="00000500000000000000" pitchFamily="2" charset="-78"/>
+                        </a:rPr>
+                        <a:t>19,078</a:t>
+                      </a:r>
+                    </a:p>
+                  </a:txBody>
+                  <a:tcPr anchor="ctr">
+                    <a:solidFill>
+                      <a:srgbClr val="263D54"/>
+                    </a:solidFill>
+                  </a:tcPr>
+                </a:tc>
+                <a:tc>
+                  <a:txBody>
+                    <a:bodyPr/>
+                    <a:lstStyle/>
+                    <a:p>
+                      <a:pPr algn="ctr" rtl="1"/>
+                      <a:r>
+                        <a:rPr sz="1050" b="1">
+                          <a:solidFill>
+                            <a:srgbClr val="FFFFFF"/>
+                          </a:solidFill>
+                          <a:latin typeface="Tajawal" panose="00000500000000000000" pitchFamily="2" charset="-78"/>
+                          <a:cs typeface="Tajawal" panose="00000500000000000000" pitchFamily="2" charset="-78"/>
+                        </a:rPr>
+                        <a:t>19,078</a:t>
+                      </a:r>
+                    </a:p>
+                  </a:txBody>
+                  <a:tcPr anchor="ctr">
+                    <a:solidFill>
+                      <a:srgbClr val="263D54"/>
+                    </a:solidFill>
+                  </a:tcPr>
+                </a:tc>
+                <a:tc>
+                  <a:txBody>
+                    <a:bodyPr/>
+                    <a:lstStyle/>
+                    <a:p>
+                      <a:pPr algn="ctr" rtl="1"/>
+                      <a:r>
+                        <a:rPr sz="1050" b="1">
+                          <a:solidFill>
+                            <a:srgbClr val="FFFFFF"/>
+                          </a:solidFill>
+                          <a:latin typeface="Tajawal" panose="00000500000000000000" pitchFamily="2" charset="-78"/>
+                          <a:cs typeface="Tajawal" panose="00000500000000000000" pitchFamily="2" charset="-78"/>
+                        </a:rPr>
+                        <a:t>21,947</a:t>
+                      </a:r>
+                    </a:p>
+                  </a:txBody>
+                  <a:tcPr anchor="ctr">
+                    <a:solidFill>
+                      <a:srgbClr val="263D54"/>
+                    </a:solidFill>
+                  </a:tcPr>
+                </a:tc>
+                <a:tc>
+                  <a:txBody>
+                    <a:bodyPr/>
+                    <a:lstStyle/>
+                    <a:p>
+                      <a:pPr algn="ctr" rtl="1"/>
+                      <a:r>
+                        <a:rPr sz="1050" b="1">
+                          <a:solidFill>
+                            <a:srgbClr val="FFFFFF"/>
+                          </a:solidFill>
+                          <a:latin typeface="Tajawal" panose="00000500000000000000" pitchFamily="2" charset="-78"/>
+                          <a:cs typeface="Tajawal" panose="00000500000000000000" pitchFamily="2" charset="-78"/>
+                        </a:rPr>
+                        <a:t>21,947</a:t>
+                      </a:r>
+                    </a:p>
+                  </a:txBody>
+                  <a:tcPr anchor="ctr">
+                    <a:solidFill>
+                      <a:srgbClr val="263D54"/>
+                    </a:solidFill>
+                  </a:tcPr>
+                </a:tc>
+                <a:tc>
+                  <a:txBody>
+                    <a:bodyPr/>
+                    <a:lstStyle/>
+                    <a:p>
+                      <a:pPr algn="ctr" rtl="1"/>
+                      <a:r>
+                        <a:rPr sz="1050" b="1" dirty="0">
+                          <a:solidFill>
+                            <a:srgbClr val="FFFFFF"/>
+                          </a:solidFill>
+                          <a:latin typeface="Tajawal" panose="00000500000000000000" pitchFamily="2" charset="-78"/>
+                          <a:cs typeface="Tajawal" panose="00000500000000000000" pitchFamily="2" charset="-78"/>
+                        </a:rPr>
+                        <a:t>الإجمالي</a:t>
+                      </a:r>
+                    </a:p>
+                  </a:txBody>
+                  <a:tcPr anchor="ctr">
+                    <a:solidFill>
+                      <a:srgbClr val="263D54"/>
+                    </a:solidFill>
+                  </a:tcPr>
+                </a:tc>
+                <a:extLst>
+                  <a:ext uri="{0D108BD9-81ED-4DB2-BD59-A6C34878D82A}">
+                    <a16:rowId xmlns:a16="http://schemas.microsoft.com/office/drawing/2014/main" val="10005"/>
+                  </a:ext>
+                </a:extLst>
+              </a:tr>
+            </a:tbl>
+          </a:graphicData>
+        </a:graphic>
+      </p:graphicFrame>
+    </p:spTree>
+    <p:extLst>
+      <p:ext uri="{BB962C8B-B14F-4D97-AF65-F5344CB8AC3E}">
+        <p14:creationId xmlns:p14="http://schemas.microsoft.com/office/powerpoint/2010/main" val="416132217"/>
+      </p:ext>
+    </p:extLst>
+  </p:cSld>
+  <p:clrMapOvr>
+    <a:masterClrMapping/>
+  </p:clrMapOvr>
+  <p:transition spd="slow">
+    <p:push dir="u"/>
+  </p:transition>
+</p:sld>
+</file>
+
+<file path=ppt/slides/slide2.xml><?xml version="1.0" encoding="utf-8"?>
+<p:sld xmlns:a="http://schemas.openxmlformats.org/drawingml/2006/main" xmlns:r="http://schemas.openxmlformats.org/officeDocument/2006/relationships" xmlns:p="http://schemas.openxmlformats.org/presentationml/2006/main">
+  <p:cSld>
+    <p:spTree>
+      <p:nvGrpSpPr>
+        <p:cNvPr id="1" name="">
+          <a:extLst>
+            <a:ext uri="{FF2B5EF4-FFF2-40B4-BE49-F238E27FC236}">
+              <a16:creationId xmlns:a16="http://schemas.microsoft.com/office/drawing/2014/main" id="{61ECCC5D-5BCD-A97C-09FA-5B81AD58E688}"/>
+            </a:ext>
+          </a:extLst>
+        </p:cNvPr>
+        <p:cNvGrpSpPr/>
+        <p:nvPr/>
+      </p:nvGrpSpPr>
+      <p:grpSpPr>
+        <a:xfrm>
+          <a:off x="0" y="0"/>
+          <a:ext cx="0" cy="0"/>
+          <a:chOff x="0" y="0"/>
+          <a:chExt cx="0" cy="0"/>
+        </a:xfrm>
+      </p:grpSpPr>
+      <p:sp>
+        <p:nvSpPr>
+          <p:cNvPr id="76" name="Rectangle: Rounded Corners 75">
+            <a:extLst>
+              <a:ext uri="{FF2B5EF4-FFF2-40B4-BE49-F238E27FC236}">
+                <a16:creationId xmlns:a16="http://schemas.microsoft.com/office/drawing/2014/main" id="{5E99A57F-8580-C6E6-EC39-77343770A76B}"/>
+              </a:ext>
+            </a:extLst>
+          </p:cNvPr>
+          <p:cNvSpPr/>
+          <p:nvPr/>
+        </p:nvSpPr>
+        <p:spPr>
+          <a:xfrm>
+            <a:off x="11589284" y="1429090"/>
+            <a:ext cx="311468" cy="4389944"/>
+          </a:xfrm>
+          <a:prstGeom prst="roundRect">
+            <a:avLst/>
+          </a:prstGeom>
+          <a:solidFill>
+            <a:srgbClr val="89A895"/>
+          </a:solidFill>
+          <a:ln>
+            <a:noFill/>
+          </a:ln>
+        </p:spPr>
+        <p:style>
+          <a:lnRef idx="2">
+            <a:schemeClr val="accent1">
+              <a:shade val="15000"/>
+            </a:schemeClr>
+          </a:lnRef>
+          <a:fillRef idx="1">
+            <a:schemeClr val="accent1"/>
+          </a:fillRef>
+          <a:effectRef idx="0">
+            <a:schemeClr val="accent1"/>
+          </a:effectRef>
+          <a:fontRef idx="minor">
+            <a:schemeClr val="lt1"/>
+          </a:fontRef>
+        </p:style>
+        <p:txBody>
+          <a:bodyPr rtlCol="0" anchor="ctr"/>
+          <a:lstStyle/>
+          <a:p>
+            <a:pPr marL="0" marR="0" lvl="0" indent="0" algn="ctr" defTabSz="914400" rtl="0" eaLnBrk="1" fontAlgn="auto" latinLnBrk="0" hangingPunct="1">
+              <a:lnSpc>
+                <a:spcPct val="100000"/>
+              </a:lnSpc>
+              <a:spcBef>
+                <a:spcPts val="0"/>
+              </a:spcBef>
+              <a:spcAft>
+                <a:spcPts val="0"/>
+              </a:spcAft>
+              <a:buClrTx/>
+              <a:buSzTx/>
+              <a:buFontTx/>
+              <a:buNone/>
+              <a:tabLst/>
+              <a:defRPr/>
+            </a:pPr>
+            <a:endParaRPr kumimoji="0" lang="en-US" sz="1800" b="0" i="0" u="none" strike="noStrike" kern="1200" cap="none" spc="0" normalizeH="0" baseline="0" noProof="0">
+              <a:ln>
+                <a:noFill/>
+              </a:ln>
+              <a:solidFill>
+                <a:prstClr val="white"/>
+              </a:solidFill>
+              <a:effectLst/>
+              <a:uLnTx/>
+              <a:uFillTx/>
+              <a:latin typeface="Tajawal" panose="00000500000000000000" pitchFamily="2" charset="-78"/>
+              <a:cs typeface="Tajawal" panose="00000500000000000000" pitchFamily="2" charset="-78"/>
+            </a:endParaRPr>
+          </a:p>
+        </p:txBody>
+      </p:sp>
+      <p:pic>
+        <p:nvPicPr>
+          <p:cNvPr id="4" name="Picture 3" descr="A building with a lawn and people walking&#10;&#10;AI-generated content may be incorrect.">
+            <a:extLst>
+              <a:ext uri="{FF2B5EF4-FFF2-40B4-BE49-F238E27FC236}">
+                <a16:creationId xmlns:a16="http://schemas.microsoft.com/office/drawing/2014/main" id="{8D07E4CD-7B0C-031C-8FC6-7FFEE0E33A56}"/>
+              </a:ext>
+            </a:extLst>
+          </p:cNvPr>
+          <p:cNvPicPr>
+            <a:picLocks noChangeAspect="1"/>
+          </p:cNvPicPr>
+          <p:nvPr/>
+        </p:nvPicPr>
+        <p:blipFill>
+          <a:blip r:embed="rId2">
+            <a:alphaModFix amt="5000"/>
+            <a:extLst>
+              <a:ext uri="{28A0092B-C50C-407E-A947-70E740481C1C}">
+                <a14:useLocalDpi xmlns:a14="http://schemas.microsoft.com/office/drawing/2010/main" val="0"/>
+              </a:ext>
+            </a:extLst>
+          </a:blip>
+          <a:stretch>
+            <a:fillRect/>
+          </a:stretch>
+        </p:blipFill>
+        <p:spPr>
+          <a:xfrm>
+            <a:off x="0" y="-172968"/>
+            <a:ext cx="12192000" cy="6547373"/>
+          </a:xfrm>
+          <a:prstGeom prst="rect">
+            <a:avLst/>
+          </a:prstGeom>
+        </p:spPr>
+      </p:pic>
+      <p:sp>
+        <p:nvSpPr>
+          <p:cNvPr id="2" name="Rectangle 1">
+            <a:extLst>
+              <a:ext uri="{FF2B5EF4-FFF2-40B4-BE49-F238E27FC236}">
+                <a16:creationId xmlns:a16="http://schemas.microsoft.com/office/drawing/2014/main" id="{0499E713-5712-C8C1-A51B-E85861FC98F6}"/>
+              </a:ext>
+            </a:extLst>
+          </p:cNvPr>
+          <p:cNvSpPr/>
+          <p:nvPr/>
+        </p:nvSpPr>
+        <p:spPr>
+          <a:xfrm>
+            <a:off x="2811461" y="487234"/>
+            <a:ext cx="8408112" cy="819961"/>
+          </a:xfrm>
+          <a:prstGeom prst="rect">
+            <a:avLst/>
+          </a:prstGeom>
+          <a:noFill/>
+          <a:ln>
+            <a:noFill/>
+          </a:ln>
+        </p:spPr>
+        <p:style>
+          <a:lnRef idx="2">
+            <a:schemeClr val="accent1">
+              <a:shade val="15000"/>
+            </a:schemeClr>
+          </a:lnRef>
+          <a:fillRef idx="1">
+            <a:schemeClr val="accent1"/>
+          </a:fillRef>
+          <a:effectRef idx="0">
+            <a:schemeClr val="accent1"/>
+          </a:effectRef>
+          <a:fontRef idx="minor">
+            <a:schemeClr val="lt1"/>
+          </a:fontRef>
+        </p:style>
+        <p:txBody>
+          <a:bodyPr anchor="ctr"/>
+          <a:lstStyle/>
+          <a:p>
+            <a:pPr marL="0" marR="0" lvl="0" indent="0" algn="r" defTabSz="457200" rtl="1" eaLnBrk="1" fontAlgn="auto" latinLnBrk="0" hangingPunct="1">
+              <a:lnSpc>
+                <a:spcPct val="100000"/>
+              </a:lnSpc>
+              <a:spcBef>
+                <a:spcPts val="0"/>
+              </a:spcBef>
+              <a:spcAft>
+                <a:spcPts val="0"/>
+              </a:spcAft>
+              <a:buClrTx/>
+              <a:buSzTx/>
+              <a:buFontTx/>
+              <a:buNone/>
+              <a:tabLst/>
+              <a:defRPr/>
+            </a:pPr>
+            <a:r>
+              <a:rPr kumimoji="0" lang="ar-SA" sz="1800" b="1" i="0" u="none" strike="noStrike" kern="1200" cap="none" spc="0" normalizeH="0" baseline="0" noProof="0" dirty="0">
+                <a:ln>
+                  <a:noFill/>
+                </a:ln>
+                <a:solidFill>
+                  <a:prstClr val="black"/>
+                </a:solidFill>
+                <a:effectLst/>
+                <a:uLnTx/>
+                <a:uFillTx/>
+                <a:latin typeface="Tajawal" panose="00000500000000000000" pitchFamily="2" charset="-78"/>
+                <a:ea typeface="GE SS Two Light" panose="020A0503020102020204" pitchFamily="18" charset="-78"/>
+                <a:cs typeface="Tajawal" panose="00000500000000000000" pitchFamily="2" charset="-78"/>
+              </a:rPr>
+              <a:t>جدول المحتويات</a:t>
+            </a:r>
+            <a:r>
+              <a:rPr kumimoji="0" lang="ar-EG" sz="1800" b="1" i="0" u="none" strike="noStrike" kern="1200" cap="none" spc="0" normalizeH="0" baseline="0" noProof="0" dirty="0">
+                <a:ln>
+                  <a:noFill/>
+                </a:ln>
+                <a:solidFill>
+                  <a:prstClr val="black"/>
+                </a:solidFill>
+                <a:effectLst/>
+                <a:uLnTx/>
+                <a:uFillTx/>
+                <a:latin typeface="Tajawal" panose="00000500000000000000" pitchFamily="2" charset="-78"/>
+                <a:ea typeface="GE SS Two Light" panose="020A0503020102020204" pitchFamily="18" charset="-78"/>
+                <a:cs typeface="Tajawal" panose="00000500000000000000" pitchFamily="2" charset="-78"/>
+              </a:rPr>
+              <a:t> - Table of Contents</a:t>
+            </a:r>
+            <a:endParaRPr kumimoji="0" lang="en-SA" sz="1800" b="1" i="0" u="none" strike="noStrike" kern="1200" cap="none" spc="0" normalizeH="0" baseline="0" noProof="0" dirty="0">
+              <a:ln>
+                <a:noFill/>
+              </a:ln>
+              <a:solidFill>
+                <a:prstClr val="black"/>
+              </a:solidFill>
+              <a:effectLst/>
+              <a:uLnTx/>
+              <a:uFillTx/>
+              <a:latin typeface="Tajawal" panose="00000500000000000000" pitchFamily="2" charset="-78"/>
+              <a:ea typeface="GE SS Two Light" panose="020A0503020102020204" pitchFamily="18" charset="-78"/>
+              <a:cs typeface="Tajawal" panose="00000500000000000000" pitchFamily="2" charset="-78"/>
+            </a:endParaRPr>
+          </a:p>
+        </p:txBody>
+      </p:sp>
+      <p:sp>
+        <p:nvSpPr>
+          <p:cNvPr id="77" name="Rectangle: Top Corners One Rounded and One Snipped 2">
+            <a:extLst>
+              <a:ext uri="{FF2B5EF4-FFF2-40B4-BE49-F238E27FC236}">
+                <a16:creationId xmlns:a16="http://schemas.microsoft.com/office/drawing/2014/main" id="{A14BB113-CE19-24E5-6C0B-A86C6AA0A085}"/>
+              </a:ext>
+            </a:extLst>
+          </p:cNvPr>
+          <p:cNvSpPr/>
+          <p:nvPr/>
+        </p:nvSpPr>
+        <p:spPr>
+          <a:xfrm rot="10800000" flipV="1">
+            <a:off x="11589283" y="719589"/>
+            <a:ext cx="294127" cy="319377"/>
+          </a:xfrm>
+          <a:prstGeom prst="snipRoundRect">
+            <a:avLst>
+              <a:gd name="adj1" fmla="val 50000"/>
+              <a:gd name="adj2" fmla="val 0"/>
+            </a:avLst>
+          </a:prstGeom>
+          <a:solidFill>
+            <a:srgbClr val="89A895"/>
+          </a:solidFill>
+          <a:ln>
+            <a:solidFill>
+              <a:srgbClr val="89A895"/>
+            </a:solidFill>
+          </a:ln>
+          <a:effectLst>
+            <a:outerShdw blurRad="50800" dist="38100" dir="2700000" algn="tl" rotWithShape="0">
+              <a:prstClr val="black">
+                <a:alpha val="40000"/>
+              </a:prstClr>
+            </a:outerShdw>
+          </a:effectLst>
+        </p:spPr>
+        <p:style>
+          <a:lnRef idx="2">
+            <a:schemeClr val="accent1">
+              <a:shade val="15000"/>
+            </a:schemeClr>
+          </a:lnRef>
+          <a:fillRef idx="1">
+            <a:schemeClr val="accent1"/>
+          </a:fillRef>
+          <a:effectRef idx="0">
+            <a:schemeClr val="accent1"/>
+          </a:effectRef>
+          <a:fontRef idx="minor">
+            <a:schemeClr val="lt1"/>
+          </a:fontRef>
+        </p:style>
+        <p:txBody>
+          <a:bodyPr rtlCol="0" anchor="ctr"/>
+          <a:lstStyle/>
+          <a:p>
+            <a:pPr marL="0" marR="0" lvl="0" indent="0" algn="ctr" defTabSz="914400" rtl="1" eaLnBrk="1" fontAlgn="auto" latinLnBrk="0" hangingPunct="1">
+              <a:lnSpc>
+                <a:spcPct val="100000"/>
+              </a:lnSpc>
+              <a:spcBef>
+                <a:spcPts val="0"/>
+              </a:spcBef>
+              <a:spcAft>
+                <a:spcPts val="0"/>
+              </a:spcAft>
+              <a:buClrTx/>
+              <a:buSzTx/>
+              <a:buFontTx/>
+              <a:buNone/>
+              <a:tabLst/>
+              <a:defRPr/>
+            </a:pPr>
+            <a:endParaRPr kumimoji="0" lang="en-US" sz="1801" b="0" i="0" u="none" strike="noStrike" kern="1200" cap="none" spc="0" normalizeH="0" baseline="0" noProof="0">
+              <a:ln>
+                <a:noFill/>
+              </a:ln>
+              <a:solidFill>
+                <a:prstClr val="white"/>
+              </a:solidFill>
+              <a:effectLst/>
+              <a:uLnTx/>
+              <a:uFillTx/>
+              <a:latin typeface="Tajawal" panose="00000500000000000000" pitchFamily="2" charset="-78"/>
+              <a:cs typeface="Tajawal" panose="00000500000000000000" pitchFamily="2" charset="-78"/>
+            </a:endParaRPr>
+          </a:p>
+        </p:txBody>
+      </p:sp>
       <p:sp>
         <p:nvSpPr>
           <p:cNvPr id="78" name="TextBox 77"/>
@@ -35193,7 +37249,7 @@
                 <a:latin typeface="Tajawal" panose="00000500000000000000" pitchFamily="2" charset="-78"/>
                 <a:cs typeface="Tajawal" panose="00000500000000000000" pitchFamily="2" charset="-78"/>
               </a:rPr>
-              <a:t>03-06</a:t>
+              <a:t>03-07</a:t>
             </a:r>
           </a:p>
           <a:p>
@@ -35383,7 +37439,7 @@
                 <a:latin typeface="Tajawal" panose="00000500000000000000" pitchFamily="2" charset="-78"/>
                 <a:cs typeface="Tajawal" panose="00000500000000000000" pitchFamily="2" charset="-78"/>
               </a:rPr>
-              <a:t>07-09</a:t>
+              <a:t>08-10</a:t>
             </a:r>
           </a:p>
           <a:p>
@@ -35600,7 +37656,7 @@
                 <a:latin typeface="Tajawal" panose="00000500000000000000" pitchFamily="2" charset="-78"/>
                 <a:cs typeface="Tajawal" panose="00000500000000000000" pitchFamily="2" charset="-78"/>
               </a:rPr>
-              <a:t>10-11</a:t>
+              <a:t>11-12</a:t>
             </a:r>
             <a:r>
               <a:rPr lang="ar-EG" sz="1400" b="1" dirty="0">
@@ -35884,7 +37940,7 @@
                 <a:latin typeface="Tajawal" panose="00000500000000000000" pitchFamily="2" charset="-78"/>
                 <a:cs typeface="Tajawal" panose="00000500000000000000" pitchFamily="2" charset="-78"/>
               </a:rPr>
-              <a:t>12-15</a:t>
+              <a:t>13-16</a:t>
             </a:r>
             <a:r>
               <a:rPr lang="ar-EG" sz="1400" b="1" dirty="0">
